--- a/.claude/SKILLS/first-friday-features/output/05_2026_first_friday_features.pptx
+++ b/.claude/SKILLS/first-friday-features/output/05_2026_first_friday_features.pptx
@@ -25,6 +25,8 @@
     <p:sldId id="277" r:id="rId43"/>
     <p:sldId id="278" r:id="rId44"/>
     <p:sldId id="279" r:id="rId45"/>
+    <p:sldId id="280" r:id="rId46"/>
+    <p:sldId id="281" r:id="rId47"/>
   </p:sldIdLst>
   <p:sldSz cy="5143500" cx="9144000"/>
   <p:notesSz cx="6858000" cy="9144000"/>
@@ -6291,6 +6293,67 @@
                 </a:hlinkClick>
                 <a:hlinkClick r:id="rId2"/>
               </a:rPr>
+              <a:t>Connect to ClickHouse — Public Beta</a:t>
+            </a:r>
+          </a:p>
+          <a:p>
+            <a:pPr indent="0" lvl="1" marL="0" marR="419100" rtl="0" algn="l">
+              <a:lnSpc>
+                <a:spcPct val="115000"/>
+              </a:lnSpc>
+              <a:spcBef>
+                <a:spcPts val="0"/>
+              </a:spcBef>
+              <a:spcAft>
+                <a:spcPts val="0"/>
+              </a:spcAft>
+              <a:buSzPts val="1200"/>
+              <a:buNone/>
+            </a:pPr>
+            <a:r>
+              <a:rPr lang="en" u="sng">
+                <a:solidFill>
+                  <a:schemeClr val="accent5"/>
+                </a:solidFill>
+                <a:hlinkClick r:id="rId3">
+                  <a:extLst>
+                    <a:ext uri="{A12FA001-AC4F-418D-AE19-62706E023703}">
+                      <ahyp:hlinkClr val="tx"/>
+                    </a:ext>
+                  </a:extLst>
+                </a:hlinkClick>
+              </a:rPr>
+              <a:t>Sigma now supports connections to [ClickHouse](https://clickhouse.com/)</a:t>
+            </a:r>
+          </a:p>
+          <a:p>
+            <a:pPr indent="0" lvl="0" marL="0" marR="419100" rtl="0" algn="l">
+              <a:lnSpc>
+                <a:spcPct val="115000"/>
+              </a:lnSpc>
+              <a:spcBef>
+                <a:spcPts val="0"/>
+              </a:spcBef>
+              <a:spcAft>
+                <a:spcPts val="0"/>
+              </a:spcAft>
+              <a:buSzPts val="1200"/>
+              <a:buNone/>
+            </a:pPr>
+            <a:r>
+              <a:rPr lang="en" u="sng">
+                <a:solidFill>
+                  <a:schemeClr val="accent5"/>
+                </a:solidFill>
+                <a:hlinkClick r:id="rId3">
+                  <a:extLst>
+                    <a:ext uri="{A12FA001-AC4F-418D-AE19-62706E023703}">
+                      <ahyp:hlinkClr val="tx"/>
+                    </a:ext>
+                  </a:extLst>
+                </a:hlinkClick>
+                <a:hlinkClick r:id="rId3"/>
+              </a:rPr>
               <a:t>Databricks Sample Connection</a:t>
             </a:r>
           </a:p>
@@ -6382,6 +6445,67 @@
                 </a:hlinkClick>
               </a:rPr>
               <a:t>To ensure that the available Sigma templates shared to every organization are relevant and high quality, some Sigma-provided templates are now hidden from the list. The following templates owned by Sigma Templates rem...</a:t>
+            </a:r>
+          </a:p>
+          <a:p>
+            <a:pPr indent="0" lvl="0" marL="0" marR="419100" rtl="0" algn="l">
+              <a:lnSpc>
+                <a:spcPct val="115000"/>
+              </a:lnSpc>
+              <a:spcBef>
+                <a:spcPts val="0"/>
+              </a:spcBef>
+              <a:spcAft>
+                <a:spcPts val="0"/>
+              </a:spcAft>
+              <a:buSzPts val="1200"/>
+              <a:buNone/>
+            </a:pPr>
+            <a:r>
+              <a:rPr lang="en" u="sng">
+                <a:solidFill>
+                  <a:schemeClr val="accent5"/>
+                </a:solidFill>
+                <a:hlinkClick r:id="rId3">
+                  <a:extLst>
+                    <a:ext uri="{A12FA001-AC4F-418D-AE19-62706E023703}">
+                      <ahyp:hlinkClr val="tx"/>
+                    </a:ext>
+                  </a:extLst>
+                </a:hlinkClick>
+                <a:hlinkClick r:id="rId4"/>
+              </a:rPr>
+              <a:t>View materialization schedule owners in workbooks and data models</a:t>
+            </a:r>
+          </a:p>
+          <a:p>
+            <a:pPr indent="0" lvl="1" marL="0" marR="419100" rtl="0" algn="l">
+              <a:lnSpc>
+                <a:spcPct val="115000"/>
+              </a:lnSpc>
+              <a:spcBef>
+                <a:spcPts val="0"/>
+              </a:spcBef>
+              <a:spcAft>
+                <a:spcPts val="0"/>
+              </a:spcAft>
+              <a:buSzPts val="1200"/>
+              <a:buNone/>
+            </a:pPr>
+            <a:r>
+              <a:rPr lang="en" u="sng">
+                <a:solidFill>
+                  <a:schemeClr val="accent5"/>
+                </a:solidFill>
+                <a:hlinkClick r:id="rId3">
+                  <a:extLst>
+                    <a:ext uri="{A12FA001-AC4F-418D-AE19-62706E023703}">
+                      <ahyp:hlinkClr val="tx"/>
+                    </a:ext>
+                  </a:extLst>
+                </a:hlinkClick>
+              </a:rPr>
+              <a:t>You can now see who owns a materialization for an element in a materialization schedule by opening the `Materialization schedules` modal.</a:t>
             </a:r>
           </a:p>
         </p:txBody>
@@ -6683,7 +6807,7 @@
             </a:pPr>
             <a:r>
               <a:rPr lang="en"/>
-              <a:t>API - Quick Hits</a:t>
+              <a:t>AI - Quick Hits</a:t>
             </a:r>
             <a:endParaRPr/>
           </a:p>
@@ -6748,7 +6872,7 @@
                 </a:hlinkClick>
                 <a:hlinkClick r:id="rId2"/>
               </a:rPr>
-              <a:t>Custom SQL Elements in List Sources Endpoints</a:t>
+              <a:t>Support for Amazon Bedrock AI provider — Public Beta</a:t>
             </a:r>
           </a:p>
           <a:p>
@@ -6778,128 +6902,7 @@
                   </a:extLst>
                 </a:hlinkClick>
               </a:rPr>
-              <a:t>The `List data model sources`, `List workbook sources`, and `List report sources` endpoints now include custom SQL elements in their responses.</a:t>
-            </a:r>
-          </a:p>
-          <a:p>
-            <a:pPr indent="0" lvl="0" marL="0" marR="419100" rtl="0" algn="l">
-              <a:lnSpc>
-                <a:spcPct val="115000"/>
-              </a:lnSpc>
-              <a:spcBef>
-                <a:spcPts val="0"/>
-              </a:spcBef>
-              <a:spcAft>
-                <a:spcPts val="0"/>
-              </a:spcAft>
-              <a:buSzPts val="1200"/>
-              <a:buNone/>
-            </a:pPr>
-            <a:r>
-              <a:rPr lang="en" u="sng">
-                <a:solidFill>
-                  <a:schemeClr val="accent5"/>
-                </a:solidFill>
-                <a:hlinkClick r:id="rId3">
-                  <a:extLst>
-                    <a:ext uri="{A12FA001-AC4F-418D-AE19-62706E023703}">
-                      <ahyp:hlinkClr val="tx"/>
-                    </a:ext>
-                  </a:extLst>
-                </a:hlinkClick>
-                <a:hlinkClick r:id="rId3"/>
-              </a:rPr>
-              <a:t>New API Endpoint for Setting Organization Time Zone</a:t>
-            </a:r>
-          </a:p>
-          <a:p>
-            <a:pPr indent="0" lvl="1" marL="0" marR="419100" rtl="0" algn="l">
-              <a:lnSpc>
-                <a:spcPct val="115000"/>
-              </a:lnSpc>
-              <a:spcBef>
-                <a:spcPts val="0"/>
-              </a:spcBef>
-              <a:spcAft>
-                <a:spcPts val="0"/>
-              </a:spcAft>
-              <a:buSzPts val="1200"/>
-              <a:buNone/>
-            </a:pPr>
-            <a:r>
-              <a:rPr lang="en" u="sng">
-                <a:solidFill>
-                  <a:schemeClr val="accent5"/>
-                </a:solidFill>
-                <a:hlinkClick r:id="rId3">
-                  <a:extLst>
-                    <a:ext uri="{A12FA001-AC4F-418D-AE19-62706E023703}">
-                      <ahyp:hlinkClr val="tx"/>
-                    </a:ext>
-                  </a:extLst>
-                </a:hlinkClick>
-              </a:rPr>
-              <a:t>The `Update organization settings` endpoint (`PATCH /v2/organizations/settings`) configures the time zone of an organization, including Sigma Tenants — useful for admins managing multi-region deployments programmatica...</a:t>
-            </a:r>
-          </a:p>
-          <a:p>
-            <a:pPr indent="0" lvl="0" marL="0" marR="419100" rtl="0" algn="l">
-              <a:lnSpc>
-                <a:spcPct val="115000"/>
-              </a:lnSpc>
-              <a:spcBef>
-                <a:spcPts val="0"/>
-              </a:spcBef>
-              <a:spcAft>
-                <a:spcPts val="0"/>
-              </a:spcAft>
-              <a:buSzPts val="1200"/>
-              <a:buNone/>
-            </a:pPr>
-            <a:r>
-              <a:rPr lang="en" u="sng">
-                <a:solidFill>
-                  <a:schemeClr val="accent5"/>
-                </a:solidFill>
-                <a:hlinkClick r:id="rId3">
-                  <a:extLst>
-                    <a:ext uri="{A12FA001-AC4F-418D-AE19-62706E023703}">
-                      <ahyp:hlinkClr val="tx"/>
-                    </a:ext>
-                  </a:extLst>
-                </a:hlinkClick>
-              </a:rPr>
-              <a:t>New API Endpoints for Managing Credentials and Connectors</a:t>
-            </a:r>
-          </a:p>
-          <a:p>
-            <a:pPr indent="0" lvl="1" marL="0" marR="419100" rtl="0" algn="l">
-              <a:lnSpc>
-                <a:spcPct val="115000"/>
-              </a:lnSpc>
-              <a:spcBef>
-                <a:spcPts val="0"/>
-              </a:spcBef>
-              <a:spcAft>
-                <a:spcPts val="0"/>
-              </a:spcAft>
-              <a:buSzPts val="1200"/>
-              <a:buNone/>
-            </a:pPr>
-            <a:r>
-              <a:rPr lang="en" u="sng">
-                <a:solidFill>
-                  <a:schemeClr val="accent5"/>
-                </a:solidFill>
-                <a:hlinkClick r:id="rId3">
-                  <a:extLst>
-                    <a:ext uri="{A12FA001-AC4F-418D-AE19-62706E023703}">
-                      <ahyp:hlinkClr val="tx"/>
-                    </a:ext>
-                  </a:extLst>
-                </a:hlinkClick>
-              </a:rPr>
-              <a:t>Ten new endpoints provide programmatic management of API credentials and connectors:</a:t>
+              <a:t>[Amazon Bedrock](https://aws.amazon.com/bedrock/) is now a supported AI provider, letting you use Anthropic foundation models with Sigma AI-powered features.</a:t>
             </a:r>
           </a:p>
         </p:txBody>
@@ -6964,6 +6967,287 @@
             </a:pPr>
             <a:r>
               <a:rPr lang="en"/>
+              <a:t>API - Quick Hits</a:t>
+            </a:r>
+            <a:endParaRPr/>
+          </a:p>
+        </p:txBody>
+      </p:sp>
+      <p:sp xmlns:ahyp="http://schemas.microsoft.com/office/drawing/2018/hyperlinkcolor">
+        <p:nvSpPr>
+          <p:cNvPr id="69" name="Google Shape;69;p12"/>
+          <p:cNvSpPr txBox="1"/>
+          <p:nvPr>
+            <p:ph idx="4294967295" type="body"/>
+          </p:nvPr>
+        </p:nvSpPr>
+        <p:spPr>
+          <a:xfrm>
+            <a:off x="116550" y="658075"/>
+            <a:ext cx="8864100" cy="3987000"/>
+          </a:xfrm>
+          <a:prstGeom prst="rect">
+            <a:avLst/>
+          </a:prstGeom>
+          <a:noFill/>
+          <a:ln>
+            <a:noFill/>
+          </a:ln>
+        </p:spPr>
+        <p:txBody>
+          <a:bodyPr anchorCtr="0" anchor="t" bIns="91425" lIns="91425" spcFirstLastPara="1" rIns="91425" wrap="square" tIns="91425">
+            <a:noAutofit/>
+          </a:bodyPr>
+          <a:lstStyle/>
+          <a:p>
+            <a:pPr indent="0" lvl="0" marL="0" marR="419100" rtl="0" algn="l">
+              <a:lnSpc>
+                <a:spcPct val="115000"/>
+              </a:lnSpc>
+              <a:spcBef>
+                <a:spcPts val="0"/>
+              </a:spcBef>
+              <a:spcAft>
+                <a:spcPts val="0"/>
+              </a:spcAft>
+              <a:buSzPts val="1200"/>
+              <a:buNone/>
+            </a:pPr>
+            <a:endParaRPr>
+              <a:solidFill>
+                <a:schemeClr val="accent5"/>
+              </a:solidFill>
+            </a:endParaRPr>
+            <a:r>
+              <a:rPr lang="en" u="sng">
+                <a:solidFill>
+                  <a:schemeClr val="accent5"/>
+                </a:solidFill>
+                <a:hlinkClick r:id="rId3">
+                  <a:extLst>
+                    <a:ext uri="{A12FA001-AC4F-418D-AE19-62706E023703}">
+                      <ahyp:hlinkClr val="tx"/>
+                    </a:ext>
+                  </a:extLst>
+                </a:hlinkClick>
+                <a:hlinkClick r:id="rId2"/>
+              </a:rPr>
+              <a:t>Custom SQL Elements in List Sources Endpoints</a:t>
+            </a:r>
+          </a:p>
+          <a:p>
+            <a:pPr indent="0" lvl="1" marL="0" marR="419100" rtl="0" algn="l">
+              <a:lnSpc>
+                <a:spcPct val="115000"/>
+              </a:lnSpc>
+              <a:spcBef>
+                <a:spcPts val="0"/>
+              </a:spcBef>
+              <a:spcAft>
+                <a:spcPts val="0"/>
+              </a:spcAft>
+              <a:buSzPts val="1200"/>
+              <a:buNone/>
+            </a:pPr>
+            <a:r>
+              <a:rPr lang="en" u="sng">
+                <a:solidFill>
+                  <a:schemeClr val="accent5"/>
+                </a:solidFill>
+                <a:hlinkClick r:id="rId3">
+                  <a:extLst>
+                    <a:ext uri="{A12FA001-AC4F-418D-AE19-62706E023703}">
+                      <ahyp:hlinkClr val="tx"/>
+                    </a:ext>
+                  </a:extLst>
+                </a:hlinkClick>
+              </a:rPr>
+              <a:t>The `List data model sources`, `List workbook sources`, and `List report sources` endpoints now include custom SQL elements in their responses.</a:t>
+            </a:r>
+          </a:p>
+          <a:p>
+            <a:pPr indent="0" lvl="0" marL="0" marR="419100" rtl="0" algn="l">
+              <a:lnSpc>
+                <a:spcPct val="115000"/>
+              </a:lnSpc>
+              <a:spcBef>
+                <a:spcPts val="0"/>
+              </a:spcBef>
+              <a:spcAft>
+                <a:spcPts val="0"/>
+              </a:spcAft>
+              <a:buSzPts val="1200"/>
+              <a:buNone/>
+            </a:pPr>
+            <a:r>
+              <a:rPr lang="en" u="sng">
+                <a:solidFill>
+                  <a:schemeClr val="accent5"/>
+                </a:solidFill>
+                <a:hlinkClick r:id="rId3">
+                  <a:extLst>
+                    <a:ext uri="{A12FA001-AC4F-418D-AE19-62706E023703}">
+                      <ahyp:hlinkClr val="tx"/>
+                    </a:ext>
+                  </a:extLst>
+                </a:hlinkClick>
+                <a:hlinkClick r:id="rId3"/>
+              </a:rPr>
+              <a:t>New API Endpoint for Setting Organization Time Zone</a:t>
+            </a:r>
+          </a:p>
+          <a:p>
+            <a:pPr indent="0" lvl="1" marL="0" marR="419100" rtl="0" algn="l">
+              <a:lnSpc>
+                <a:spcPct val="115000"/>
+              </a:lnSpc>
+              <a:spcBef>
+                <a:spcPts val="0"/>
+              </a:spcBef>
+              <a:spcAft>
+                <a:spcPts val="0"/>
+              </a:spcAft>
+              <a:buSzPts val="1200"/>
+              <a:buNone/>
+            </a:pPr>
+            <a:r>
+              <a:rPr lang="en" u="sng">
+                <a:solidFill>
+                  <a:schemeClr val="accent5"/>
+                </a:solidFill>
+                <a:hlinkClick r:id="rId3">
+                  <a:extLst>
+                    <a:ext uri="{A12FA001-AC4F-418D-AE19-62706E023703}">
+                      <ahyp:hlinkClr val="tx"/>
+                    </a:ext>
+                  </a:extLst>
+                </a:hlinkClick>
+              </a:rPr>
+              <a:t>The `Update organization settings` endpoint (`PATCH /v2/organizations/settings`) configures the time zone of an organization, including Sigma Tenants — useful for admins managing multi-region deployments programmatica...</a:t>
+            </a:r>
+          </a:p>
+          <a:p>
+            <a:pPr indent="0" lvl="0" marL="0" marR="419100" rtl="0" algn="l">
+              <a:lnSpc>
+                <a:spcPct val="115000"/>
+              </a:lnSpc>
+              <a:spcBef>
+                <a:spcPts val="0"/>
+              </a:spcBef>
+              <a:spcAft>
+                <a:spcPts val="0"/>
+              </a:spcAft>
+              <a:buSzPts val="1200"/>
+              <a:buNone/>
+            </a:pPr>
+            <a:r>
+              <a:rPr lang="en" u="sng">
+                <a:solidFill>
+                  <a:schemeClr val="accent5"/>
+                </a:solidFill>
+                <a:hlinkClick r:id="rId3">
+                  <a:extLst>
+                    <a:ext uri="{A12FA001-AC4F-418D-AE19-62706E023703}">
+                      <ahyp:hlinkClr val="tx"/>
+                    </a:ext>
+                  </a:extLst>
+                </a:hlinkClick>
+              </a:rPr>
+              <a:t>New API Endpoints for Managing Credentials and Connectors</a:t>
+            </a:r>
+          </a:p>
+          <a:p>
+            <a:pPr indent="0" lvl="1" marL="0" marR="419100" rtl="0" algn="l">
+              <a:lnSpc>
+                <a:spcPct val="115000"/>
+              </a:lnSpc>
+              <a:spcBef>
+                <a:spcPts val="0"/>
+              </a:spcBef>
+              <a:spcAft>
+                <a:spcPts val="0"/>
+              </a:spcAft>
+              <a:buSzPts val="1200"/>
+              <a:buNone/>
+            </a:pPr>
+            <a:r>
+              <a:rPr lang="en" u="sng">
+                <a:solidFill>
+                  <a:schemeClr val="accent5"/>
+                </a:solidFill>
+                <a:hlinkClick r:id="rId3">
+                  <a:extLst>
+                    <a:ext uri="{A12FA001-AC4F-418D-AE19-62706E023703}">
+                      <ahyp:hlinkClr val="tx"/>
+                    </a:ext>
+                  </a:extLst>
+                </a:hlinkClick>
+              </a:rPr>
+              <a:t>Ten new endpoints provide programmatic management of API credentials and connectors:</a:t>
+            </a:r>
+          </a:p>
+        </p:txBody>
+      </p:sp>
+    </p:spTree>
+  </p:cSld>
+  <p:clrMapOvr>
+    <a:masterClrMapping/>
+  </p:clrMapOvr>
+</p:sld>
+</file>
+
+<file path=ppt/slides/slide20.xml><?xml version="1.0" encoding="utf-8"?>
+<p:sld xmlns:a="http://schemas.openxmlformats.org/drawingml/2006/main" xmlns:p="http://schemas.openxmlformats.org/presentationml/2006/main" xmlns:r="http://schemas.openxmlformats.org/officeDocument/2006/relationships">
+  <p:cSld>
+    <p:spTree>
+      <p:nvGrpSpPr>
+        <p:cNvPr id="1" name=""/>
+        <p:cNvGrpSpPr/>
+        <p:nvPr/>
+      </p:nvGrpSpPr>
+      <p:grpSpPr/>
+      <p:sp>
+        <p:nvSpPr>
+          <p:cNvPr id="68" name="Google Shape;68;p12"/>
+          <p:cNvSpPr txBox="1"/>
+          <p:nvPr>
+            <p:ph type="title"/>
+          </p:nvPr>
+        </p:nvSpPr>
+        <p:spPr>
+          <a:xfrm>
+            <a:off x="116550" y="85375"/>
+            <a:ext cx="6028800" cy="572700"/>
+          </a:xfrm>
+          <a:prstGeom prst="rect">
+            <a:avLst/>
+          </a:prstGeom>
+          <a:noFill/>
+          <a:ln>
+            <a:noFill/>
+          </a:ln>
+        </p:spPr>
+        <p:txBody>
+          <a:bodyPr anchorCtr="0" anchor="t" bIns="91425" lIns="91425" spcFirstLastPara="1" rIns="91425" wrap="square" tIns="91425">
+            <a:noAutofit/>
+          </a:bodyPr>
+          <a:lstStyle/>
+          <a:p>
+            <a:pPr indent="0" lvl="0" marL="0" rtl="0" algn="l">
+              <a:lnSpc>
+                <a:spcPct val="100000"/>
+              </a:lnSpc>
+              <a:spcBef>
+                <a:spcPts val="0"/>
+              </a:spcBef>
+              <a:spcAft>
+                <a:spcPts val="0"/>
+              </a:spcAft>
+              <a:buSzPts val="2500"/>
+              <a:buNone/>
+            </a:pPr>
+            <a:r>
+              <a:rPr lang="en"/>
               <a:t>Charts - Quick Hits</a:t>
             </a:r>
             <a:endParaRPr/>
@@ -7071,7 +7355,7 @@
 </p:sld>
 </file>
 
-<file path=ppt/slides/slide20.xml><?xml version="1.0" encoding="utf-8"?>
+<file path=ppt/slides/slide21.xml><?xml version="1.0" encoding="utf-8"?>
 <p:sld xmlns:a="http://schemas.openxmlformats.org/drawingml/2006/main" xmlns:p="http://schemas.openxmlformats.org/presentationml/2006/main" xmlns:r="http://schemas.openxmlformats.org/officeDocument/2006/relationships">
   <p:cSld>
     <p:spTree>
@@ -7308,7 +7592,262 @@
 </p:sld>
 </file>
 
-<file path=ppt/slides/slide21.xml><?xml version="1.0" encoding="utf-8"?>
+<file path=ppt/slides/slide22.xml><?xml version="1.0" encoding="utf-8"?>
+<p:sld xmlns:a="http://schemas.openxmlformats.org/drawingml/2006/main" xmlns:p="http://schemas.openxmlformats.org/presentationml/2006/main" xmlns:r="http://schemas.openxmlformats.org/officeDocument/2006/relationships">
+  <p:cSld>
+    <p:spTree>
+      <p:nvGrpSpPr>
+        <p:cNvPr id="1" name=""/>
+        <p:cNvGrpSpPr/>
+        <p:nvPr/>
+      </p:nvGrpSpPr>
+      <p:grpSpPr/>
+      <p:sp>
+        <p:nvSpPr>
+          <p:cNvPr id="59" name="Google Shape;59;p13"/>
+          <p:cNvSpPr txBox="1"/>
+          <p:nvPr>
+            <p:ph type="title"/>
+          </p:nvPr>
+        </p:nvSpPr>
+        <p:spPr>
+          <a:xfrm>
+            <a:off x="417625" y="88900"/>
+            <a:ext cx="6028800" cy="572700"/>
+          </a:xfrm>
+          <a:prstGeom prst="rect">
+            <a:avLst/>
+          </a:prstGeom>
+          <a:noFill/>
+          <a:ln>
+            <a:noFill/>
+          </a:ln>
+        </p:spPr>
+        <p:txBody>
+          <a:bodyPr anchorCtr="0" anchor="t" bIns="91425" lIns="91425" spcFirstLastPara="1" rIns="91425" wrap="square" tIns="91425">
+            <a:noAutofit/>
+          </a:bodyPr>
+          <a:lstStyle/>
+          <a:p>
+            <a:pPr indent="0" lvl="0" marL="0" rtl="0" algn="l">
+              <a:lnSpc>
+                <a:spcPct val="100000"/>
+              </a:lnSpc>
+              <a:spcBef>
+                <a:spcPts val="0"/>
+              </a:spcBef>
+              <a:spcAft>
+                <a:spcPts val="0"/>
+              </a:spcAft>
+              <a:buSzPts val="2500"/>
+              <a:buNone/>
+            </a:pPr>
+            <a:r>
+              <a:rPr lang="en" u="sng">
+                <a:solidFill>
+                  <a:schemeClr val="hlink"/>
+                </a:solidFill>
+              </a:rPr>
+              <a:t>True Transparency for Element Backgrounds</a:t>
+            </a:r>
+            <a:endParaRPr>
+              <a:highlight>
+                <a:srgbClr val="4CEC8C"/>
+              </a:highlight>
+            </a:endParaRPr>
+          </a:p>
+        </p:txBody>
+      </p:sp>
+      <p:sp>
+        <p:nvSpPr>
+          <p:cNvPr id="60" name="Google Shape;60;p13"/>
+          <p:cNvSpPr txBox="1"/>
+          <p:nvPr>
+            <p:ph idx="1" type="body"/>
+          </p:nvPr>
+        </p:nvSpPr>
+        <p:spPr>
+          <a:xfrm>
+            <a:off x="42975" y="658076"/>
+            <a:ext cx="4154400" cy="3863400"/>
+          </a:xfrm>
+          <a:prstGeom prst="rect">
+            <a:avLst/>
+          </a:prstGeom>
+          <a:noFill/>
+          <a:ln>
+            <a:noFill/>
+          </a:ln>
+        </p:spPr>
+        <p:txBody>
+          <a:bodyPr anchorCtr="0" anchor="t" bIns="91425" lIns="91425" spcFirstLastPara="1" rIns="91425" wrap="square" tIns="91425">
+            <a:normAutofit/>
+          </a:bodyPr>
+          <a:lstStyle/>
+          <a:p>
+            <a:pPr indent="0" lvl="0" marL="0" rtl="0" algn="l">
+              <a:lnSpc>
+                <a:spcPct val="100000"/>
+              </a:lnSpc>
+              <a:spcBef>
+                <a:spcPts val="0"/>
+              </a:spcBef>
+              <a:spcAft>
+                <a:spcPts val="0"/>
+              </a:spcAft>
+              <a:buSzPts val="1200"/>
+              <a:buNone/>
+            </a:pPr>
+            <a:endParaRPr/>
+            <a:r>
+              <a:rPr lang="en"/>
+              <a:t>Setting an element's background color to `None` now renders as genuine transparency, allowing page and container background images to show through rather than defaulting to the background color.</a:t>
+            </a:r>
+          </a:p>
+          <a:p>
+            <a:pPr indent="0" lvl="0" marL="0" rtl="0" algn="l">
+              <a:lnSpc>
+                <a:spcPct val="100000"/>
+              </a:lnSpc>
+              <a:spcBef>
+                <a:spcPts val="0"/>
+              </a:spcBef>
+              <a:spcAft>
+                <a:spcPts val="0"/>
+              </a:spcAft>
+              <a:buSzPts val="1200"/>
+              <a:buNone/>
+            </a:pPr>
+            <a:r>
+              <a:rPr lang="en"/>
+              <a:t>For example, the image on the left is using a white background while the other is transparent:</a:t>
+            </a:r>
+          </a:p>
+          <a:p>
+            <a:pPr indent="0" lvl="0" marL="0" rtl="0" algn="l">
+              <a:lnSpc>
+                <a:spcPct val="100000"/>
+              </a:lnSpc>
+              <a:spcBef>
+                <a:spcPts val="0"/>
+              </a:spcBef>
+              <a:spcAft>
+                <a:spcPts val="0"/>
+              </a:spcAft>
+              <a:buSzPts val="1200"/>
+              <a:buNone/>
+            </a:pPr>
+            <a:r>
+              <a:rPr lang="en"/>
+              <a:t>Why it matters: Element backgrounds set to `None` finally render as true transparency, unlocking layered designs where page or container background imagery shows through. This matters for branded dashboards, embedded experiences, and any presentation-quality output where visual polish is part of the deliverable.</a:t>
+            </a:r>
+          </a:p>
+        </p:txBody>
+      </p:sp>
+      <p:sp>
+        <p:nvSpPr>
+          <p:cNvPr id="61" name="Google Shape;61;p13"/>
+          <p:cNvSpPr txBox="1"/>
+          <p:nvPr/>
+        </p:nvSpPr>
+        <p:spPr>
+          <a:xfrm>
+            <a:off x="7632575" y="0"/>
+            <a:ext cx="1511400" cy="374100"/>
+          </a:xfrm>
+          <a:prstGeom prst="rect">
+            <a:avLst/>
+          </a:prstGeom>
+          <a:solidFill>
+            <a:srgbClr val="4CEC8C"/>
+          </a:solidFill>
+          <a:ln>
+            <a:noFill/>
+          </a:ln>
+        </p:spPr>
+        <p:txBody>
+          <a:bodyPr anchorCtr="0" anchor="t" bIns="91425" lIns="91425" spcFirstLastPara="1" rIns="91425" wrap="square" tIns="91425">
+            <a:noAutofit/>
+          </a:bodyPr>
+          <a:lstStyle/>
+          <a:p>
+            <a:pPr indent="0" lvl="0" marL="0" marR="0" rtl="0" algn="ctr">
+              <a:lnSpc>
+                <a:spcPct val="100000"/>
+              </a:lnSpc>
+              <a:spcBef>
+                <a:spcPts val="0"/>
+              </a:spcBef>
+              <a:spcAft>
+                <a:spcPts val="0"/>
+              </a:spcAft>
+              <a:buClr>
+                <a:srgbClr val="000000"/>
+              </a:buClr>
+              <a:buSzPts val="1200"/>
+              <a:buFont typeface="Arial"/>
+              <a:buNone/>
+            </a:pPr>
+            <a:r>
+              <a:rPr b="0" i="0" lang="en" sz="1200" u="none" cap="none" strike="noStrike">
+                <a:solidFill>
+                  <a:srgbClr val="292929"/>
+                </a:solidFill>
+                <a:latin typeface="DM Sans"/>
+                <a:ea typeface="DM Sans"/>
+                <a:cs typeface="DM Sans"/>
+                <a:sym typeface="DM Sans"/>
+              </a:rPr>
+              <a:t>GA</a:t>
+            </a:r>
+            <a:endParaRPr b="0" i="0" sz="1200" u="none" cap="none" strike="noStrike">
+              <a:solidFill>
+                <a:srgbClr val="292929"/>
+              </a:solidFill>
+              <a:latin typeface="DM Sans"/>
+              <a:ea typeface="DM Sans"/>
+              <a:cs typeface="DM Sans"/>
+              <a:sym typeface="DM Sans"/>
+            </a:endParaRPr>
+          </a:p>
+        </p:txBody>
+      </p:sp>
+      <p:pic>
+        <p:nvPicPr>
+          <p:cNvPr id="63" name="Google Shape;63;p13"/>
+          <p:cNvPicPr preferRelativeResize="0"/>
+          <p:nvPr/>
+        </p:nvPicPr>
+        <p:blipFill rotWithShape="1">
+          <a:blip r:embed="rId5">
+            <a:alphaModFix/>
+          </a:blip>
+          <a:srcRect b="0" l="0" r="0" t="0"/>
+          <a:stretch/>
+        </p:blipFill>
+        <p:spPr>
+          <a:xfrm>
+            <a:off x="4179075" y="714500"/>
+            <a:ext cx="4866099" cy="2128921"/>
+          </a:xfrm>
+          <a:prstGeom prst="rect">
+            <a:avLst/>
+          </a:prstGeom>
+          <a:noFill/>
+          <a:ln>
+            <a:noFill/>
+          </a:ln>
+        </p:spPr>
+      </p:pic>
+    </p:spTree>
+  </p:cSld>
+  <p:clrMapOvr>
+    <a:masterClrMapping/>
+  </p:clrMapOvr>
+</p:sld>
+</file>
+
+<file path=ppt/slides/slide23.xml><?xml version="1.0" encoding="utf-8"?>
 <p:sld xmlns:a="http://schemas.openxmlformats.org/drawingml/2006/main" xmlns:p="http://schemas.openxmlformats.org/presentationml/2006/main" xmlns:r="http://schemas.openxmlformats.org/officeDocument/2006/relationships">
   <p:cSld>
     <p:spTree>
@@ -7579,66 +8118,6 @@
               <a:t>Localize the Sigma UI in a workbook by adding the `:lng=&lt;locale&gt;` query string parameter to its URL — supports global teams that need Sigma in their working language.</a:t>
             </a:r>
           </a:p>
-          <a:p>
-            <a:pPr indent="0" lvl="0" marL="0" marR="419100" rtl="0" algn="l">
-              <a:lnSpc>
-                <a:spcPct val="115000"/>
-              </a:lnSpc>
-              <a:spcBef>
-                <a:spcPts val="0"/>
-              </a:spcBef>
-              <a:spcAft>
-                <a:spcPts val="0"/>
-              </a:spcAft>
-              <a:buSzPts val="1200"/>
-              <a:buNone/>
-            </a:pPr>
-            <a:r>
-              <a:rPr lang="en" u="sng">
-                <a:solidFill>
-                  <a:schemeClr val="accent5"/>
-                </a:solidFill>
-                <a:hlinkClick r:id="rId3">
-                  <a:extLst>
-                    <a:ext uri="{A12FA001-AC4F-418D-AE19-62706E023703}">
-                      <ahyp:hlinkClr val="tx"/>
-                    </a:ext>
-                  </a:extLst>
-                </a:hlinkClick>
-              </a:rPr>
-              <a:t>True Transparency for Element Backgrounds</a:t>
-            </a:r>
-          </a:p>
-          <a:p>
-            <a:pPr indent="0" lvl="1" marL="0" marR="419100" rtl="0" algn="l">
-              <a:lnSpc>
-                <a:spcPct val="115000"/>
-              </a:lnSpc>
-              <a:spcBef>
-                <a:spcPts val="0"/>
-              </a:spcBef>
-              <a:spcAft>
-                <a:spcPts val="0"/>
-              </a:spcAft>
-              <a:buSzPts val="1200"/>
-              <a:buNone/>
-            </a:pPr>
-            <a:r>
-              <a:rPr lang="en" u="sng">
-                <a:solidFill>
-                  <a:schemeClr val="accent5"/>
-                </a:solidFill>
-                <a:hlinkClick r:id="rId3">
-                  <a:extLst>
-                    <a:ext uri="{A12FA001-AC4F-418D-AE19-62706E023703}">
-                      <ahyp:hlinkClr val="tx"/>
-                    </a:ext>
-                  </a:extLst>
-                </a:hlinkClick>
-              </a:rPr>
-              <a:t>Setting an element's background color to `None` now renders as genuine transparency, allowing page and container background images to show through rather than defaulting to the background color.</a:t>
-            </a:r>
-          </a:p>
         </p:txBody>
       </p:sp>
     </p:spTree>
@@ -7649,7 +8128,7 @@
 </p:sld>
 </file>
 
-<file path=ppt/slides/slide22.xml><?xml version="1.0" encoding="utf-8"?>
+<file path=ppt/slides/slide24.xml><?xml version="1.0" encoding="utf-8"?>
 <p:sld xmlns:a="http://schemas.openxmlformats.org/drawingml/2006/main" xmlns:p="http://schemas.openxmlformats.org/presentationml/2006/main" xmlns:r="http://schemas.openxmlformats.org/officeDocument/2006/relationships">
   <p:cSld>
     <p:spTree>
@@ -7756,6 +8235,55 @@
                 <a:hlinkClick r:id="rId3"/>
                 <a:hlinkClick r:id="rId2"/>
               </a:rPr>
+              <a:t>Fundamentals 12: Build App-Style Layouts in Sigma</a:t>
+            </a:r>
+          </a:p>
+          <a:p>
+            <a:pPr indent="0" lvl="1" marL="0" marR="419100" rtl="0" algn="l">
+              <a:lnSpc>
+                <a:spcPct val="115000"/>
+              </a:lnSpc>
+              <a:spcBef>
+                <a:spcPts val="0"/>
+              </a:spcBef>
+              <a:spcAft>
+                <a:spcPts val="0"/>
+              </a:spcAft>
+              <a:buSzPts val="1400"/>
+              <a:buNone/>
+            </a:pPr>
+            <a:r>
+              <a:rPr lang="en" u="sng">
+                <a:solidFill>
+                  <a:schemeClr val="hlink"/>
+                </a:solidFill>
+                <a:hlinkClick r:id="rId3"/>
+              </a:rPr>
+              <a:t>This QuickStart shows how to turn a structured table into a card-based catalog with a click-through detail view, using Sigma's Repeater and Single Row containers.</a:t>
+            </a:r>
+          </a:p>
+          <a:p>
+            <a:pPr indent="0" lvl="0" marL="0" marR="419100" rtl="0" algn="l">
+              <a:lnSpc>
+                <a:spcPct val="115000"/>
+              </a:lnSpc>
+              <a:spcBef>
+                <a:spcPts val="0"/>
+              </a:spcBef>
+              <a:spcAft>
+                <a:spcPts val="0"/>
+              </a:spcAft>
+              <a:buSzPts val="1400"/>
+              <a:buNone/>
+            </a:pPr>
+            <a:r>
+              <a:rPr lang="en" u="sng">
+                <a:solidFill>
+                  <a:schemeClr val="hlink"/>
+                </a:solidFill>
+                <a:hlinkClick r:id="rId3"/>
+                <a:hlinkClick r:id="rId3"/>
+              </a:rPr>
               <a:t>Sigma Skills for AI Assistants</a:t>
             </a:r>
           </a:p>
@@ -7793,7 +8321,7 @@
 </p:sld>
 </file>
 
-<file path=ppt/slides/slide23.xml><?xml version="1.0" encoding="utf-8"?>
+<file path=ppt/slides/slide25.xml><?xml version="1.0" encoding="utf-8"?>
 <p:sld xmlns:a="http://schemas.openxmlformats.org/drawingml/2006/main" xmlns:p="http://schemas.openxmlformats.org/presentationml/2006/main" xmlns:r="http://schemas.openxmlformats.org/officeDocument/2006/relationships">
   <p:cSld>
     <p:spTree>
@@ -7894,7 +8422,64 @@
             <a:endParaRPr sz="1200"/>
             <a:r>
               <a:rPr b="1" lang="en" sz="1200"/>
-              <a:t>Invalid Image URL Warning — The editor now displays an Invalid image URL alert when background image URLs are malformed.</a:t>
+              <a:t>The editor now displays an Invalid image URL alert when background image URLs are malformed.</a:t>
+            </a:r>
+          </a:p>
+          <a:p>
+            <a:pPr indent="-304800" lvl="0" marL="457200" marR="419100" rtl="0" algn="l">
+              <a:lnSpc>
+                <a:spcPct val="150000"/>
+              </a:lnSpc>
+              <a:spcBef>
+                <a:spcPts val="0"/>
+              </a:spcBef>
+              <a:spcAft>
+                <a:spcPts val="0"/>
+              </a:spcAft>
+              <a:buSzPts val="1200"/>
+              <a:buAutoNum type="arabicPeriod"/>
+            </a:pPr>
+            <a:r>
+              <a:rPr b="1" lang="en" sz="1200"/>
+              <a:t>For organizations with greater than 15,000 user attributes, admins could not specify a user attribute to dynamically set a role or wareho...</a:t>
+            </a:r>
+          </a:p>
+          <a:p>
+            <a:pPr indent="-304800" lvl="0" marL="457200" marR="419100" rtl="0" algn="l">
+              <a:lnSpc>
+                <a:spcPct val="150000"/>
+              </a:lnSpc>
+              <a:spcBef>
+                <a:spcPts val="0"/>
+              </a:spcBef>
+              <a:spcAft>
+                <a:spcPts val="0"/>
+              </a:spcAft>
+              <a:buSzPts val="1200"/>
+              <a:buAutoNum type="arabicPeriod"/>
+            </a:pPr>
+            <a:r>
+              <a:rPr b="1" lang="en" sz="1200"/>
+              <a:t>Users in tenant organizations were unable to duplicate or tag versions of deployed documents.</a:t>
+            </a:r>
+          </a:p>
+          <a:p>
+            <a:pPr indent="-304800" lvl="0" marL="457200" marR="419100" rtl="0" algn="l">
+              <a:lnSpc>
+                <a:spcPct val="150000"/>
+              </a:lnSpc>
+              <a:spcBef>
+                <a:spcPts val="0"/>
+              </a:spcBef>
+              <a:spcAft>
+                <a:spcPts val="0"/>
+              </a:spcAft>
+              <a:buSzPts val="1200"/>
+              <a:buAutoNum type="arabicPeriod"/>
+            </a:pPr>
+            <a:r>
+              <a:rPr b="1" lang="en" sz="1200"/>
+              <a:t>When a deployed workbook was version tagged, the Get deployed workbook in a tenant organization API endpoint did not successfully return ...</a:t>
             </a:r>
           </a:p>
         </p:txBody>
@@ -7907,7 +8492,7 @@
 </p:sld>
 </file>
 
-<file path=ppt/slides/slide24.xml><?xml version="1.0" encoding="utf-8"?>
+<file path=ppt/slides/slide26.xml><?xml version="1.0" encoding="utf-8"?>
 <p:sld xmlns:a="http://schemas.openxmlformats.org/drawingml/2006/main" xmlns:p="http://schemas.openxmlformats.org/presentationml/2006/main" xmlns:r="http://schemas.openxmlformats.org/officeDocument/2006/relationships">
   <p:cSld>
     <p:spTree>
